--- a/marketing/Hotels-In-Alibaug-App-Demo-Marathi.pptx
+++ b/marketing/Hotels-In-Alibaug-App-Demo-Marathi.pptx
@@ -4777,7 +4777,7 @@
           <p:cNvPr id="4" name="TextBox 3">
             <a:extLst>
               <a:ext uri="{FF2B5EF4-FFF2-40B4-BE49-F238E27FC236}">
-                <a16:creationId xmlns:a16="http://schemas.microsoft.com/office/drawing/2014/main" id="{25CF80A7-8AE3-BBBF-DDE3-3447BD3D46B3}"/>
+                <a16:creationId xmlns:a16="http://schemas.microsoft.com/office/drawing/2014/main" id="{CC163DCC-072A-6812-7F71-227D3FE0A51D}"/>
               </a:ext>
             </a:extLst>
           </p:cNvPr>
